--- a/public/retrieval-whiteboard-recall-template.pptx
+++ b/public/retrieval-whiteboard-recall-template.pptx
@@ -2,13 +2,13 @@
 <file path=ppt/presentation.xml><?xml version="1.0" encoding="utf-8"?>
 <p:presentation xmlns:p="http://schemas.openxmlformats.org/presentationml/2006/main">
   <p:sldMasterIdLst>
-    <p:sldMasterId xmlns:r="http://schemas.openxmlformats.org/officeDocument/2006/relationships" id="2147483648" r:id="Rd18a3aa088f046ed"/>
+    <p:sldMasterId xmlns:r="http://schemas.openxmlformats.org/officeDocument/2006/relationships" id="2147483648" r:id="R8c9d0bc7ed514a64"/>
   </p:sldMasterIdLst>
   <p:notesMasterIdLst>
-    <p:notesMasterId xmlns:r="http://schemas.openxmlformats.org/officeDocument/2006/relationships" r:id="R965e7e6bec8c4043"/>
+    <p:notesMasterId xmlns:r="http://schemas.openxmlformats.org/officeDocument/2006/relationships" r:id="R5913ebf2301048c1"/>
   </p:notesMasterIdLst>
   <p:sldIdLst>
-    <p:sldId xmlns:r="http://schemas.openxmlformats.org/officeDocument/2006/relationships" id="256" r:id="R084f82b7729940e1"/>
+    <p:sldId xmlns:r="http://schemas.openxmlformats.org/officeDocument/2006/relationships" id="256" r:id="R72dc33e3e7254872"/>
   </p:sldIdLst>
   <p:sldSz cx="12192000" cy="6858000"/>
   <p:notesSz cx="6858000" cy="9144000"/>
@@ -442,7 +442,7 @@
           <a:lstStyle xmlns:a="http://schemas.openxmlformats.org/drawingml/2006/main"/>
           <a:p xmlns:a="http://schemas.openxmlformats.org/drawingml/2006/main">
             <a:r>
-              <a:t>Teacher setup: Replace bracketed text before teaching. Every text box is editable. Duplicate the slide for checked answers or a second prompt. Keep prompt and answer sides separate when printing cards.</a:t>
+              <a:t>Teacher setup: Replace bracketed text before teaching. All text and shapes are editable. Duplicate the slide for answers or another prompt. For card activities, separate prompt and answer sides before printing.</a:t>
             </a:r>
           </a:p>
           <a:p xmlns:a="http://schemas.openxmlformats.org/drawingml/2006/main">
@@ -452,17 +452,12 @@
           </a:p>
           <a:p xmlns:a="http://schemas.openxmlformats.org/drawingml/2006/main">
             <a:r>
-              <a:t>Activity: Whiteboard recall</a:t>
-            </a:r>
-          </a:p>
-          <a:p xmlns:a="http://schemas.openxmlformats.org/drawingml/2006/main">
-            <a:r>
               <a:t>Materials: Mini whiteboards, pens and your own prompts</a:t>
             </a:r>
           </a:p>
           <a:p xmlns:a="http://schemas.openxmlformats.org/drawingml/2006/main">
             <a:r>
-              <a:t>Suggested total time including feedback: 5 minutes.</a:t>
+              <a:t>Suggested time including feedback: 5 minutes.</a:t>
             </a:r>
           </a:p>
           <a:p xmlns:a="http://schemas.openxmlformats.org/drawingml/2006/main">
@@ -503,26 +498,6 @@
           <a:p xmlns:a="http://schemas.openxmlformats.org/drawingml/2006/main">
             <a:r>
               <a:t>Adapt: Accept diagrams or short phrases and adjust thinking time.</a:t>
-            </a:r>
-          </a:p>
-          <a:p xmlns:a="http://schemas.openxmlformats.org/drawingml/2006/main">
-            <a:r>
-              <a:t>Credit: Janell R. Blunt — linked classroom guidance</a:t>
-            </a:r>
-          </a:p>
-          <a:p xmlns:a="http://schemas.openxmlformats.org/drawingml/2006/main">
-            <a:r>
-              <a:t>Mini whiteboards are a shared classroom tool. Blunt is credited for the linked retrieval guidance, not as the inventor of whiteboards.</a:t>
-            </a:r>
-          </a:p>
-          <a:p xmlns:a="http://schemas.openxmlformats.org/drawingml/2006/main">
-            <a:r>
-              <a:t>Source: https://www.retrievalpractice.org/strategies/white-boards</a:t>
-            </a:r>
-          </a:p>
-          <a:p xmlns:a="http://schemas.openxmlformats.org/drawingml/2006/main">
-            <a:r>
-              <a:t>Full guide: https://tnt-teaching-tools.github.io/cold-call-classroom/retrieval-whiteboard-recall.html</a:t>
             </a:r>
           </a:p>
         </p:txBody>
@@ -569,7 +544,7 @@
           <p:cNvPr id="4" name="Accent rule">
             <a:extLst xmlns:a="http://schemas.openxmlformats.org/drawingml/2006/main">
               <a:ext uri="{FF2B5EF4-FFF2-40B4-BE49-F238E27FC236}">
-                <a16:creationId xmlns:a16="http://schemas.microsoft.com/office/drawing/2014/main" id="{589FC1B7-0643-412B-8040-5F0AD5DDC4BE}"/>
+                <a16:creationId xmlns:a16="http://schemas.microsoft.com/office/drawing/2014/main" id="{2096F537-0AE4-4B75-848F-FC2C5F624774}"/>
               </a:ext>
             </a:extLst>
           </p:cNvPr>
@@ -600,7 +575,7 @@
           <p:cNvPr id="2" name="Title">
             <a:extLst xmlns:a="http://schemas.openxmlformats.org/drawingml/2006/main">
               <a:ext uri="{FF2B5EF4-FFF2-40B4-BE49-F238E27FC236}">
-                <a16:creationId xmlns:a16="http://schemas.microsoft.com/office/drawing/2014/main" id="{9F3DA061-F79B-485A-B33F-FDBC0CC116F5}"/>
+                <a16:creationId xmlns:a16="http://schemas.microsoft.com/office/drawing/2014/main" id="{68C78299-71EC-4170-A4FD-CCFC5F01A0B8}"/>
               </a:ext>
             </a:extLst>
           </p:cNvPr>
@@ -747,7 +722,7 @@
           <p:cNvPr id="3" name="Subtitle">
             <a:extLst xmlns:a="http://schemas.openxmlformats.org/drawingml/2006/main">
               <a:ext uri="{FF2B5EF4-FFF2-40B4-BE49-F238E27FC236}">
-                <a16:creationId xmlns:a16="http://schemas.microsoft.com/office/drawing/2014/main" id="{1994E5A7-DC9A-42D9-AE44-4E3328C08924}"/>
+                <a16:creationId xmlns:a16="http://schemas.microsoft.com/office/drawing/2014/main" id="{8CE0C0C8-6B8D-44D0-B7FE-2BD1732C55AF}"/>
               </a:ext>
             </a:extLst>
           </p:cNvPr>
@@ -911,7 +886,7 @@
           <p:cNvPr id="3" name="Accent rule">
             <a:extLst xmlns:a="http://schemas.openxmlformats.org/drawingml/2006/main">
               <a:ext uri="{FF2B5EF4-FFF2-40B4-BE49-F238E27FC236}">
-                <a16:creationId xmlns:a16="http://schemas.microsoft.com/office/drawing/2014/main" id="{E5C0215F-B556-464B-8D31-86711BBEF851}"/>
+                <a16:creationId xmlns:a16="http://schemas.microsoft.com/office/drawing/2014/main" id="{E116DDD7-258C-40EC-AD65-48C3DDC6C6C1}"/>
               </a:ext>
             </a:extLst>
           </p:cNvPr>
@@ -942,7 +917,7 @@
           <p:cNvPr id="2" name="Section title">
             <a:extLst xmlns:a="http://schemas.openxmlformats.org/drawingml/2006/main">
               <a:ext uri="{FF2B5EF4-FFF2-40B4-BE49-F238E27FC236}">
-                <a16:creationId xmlns:a16="http://schemas.microsoft.com/office/drawing/2014/main" id="{35CF765B-21AD-4453-9F0A-D5DB5C44CB7B}"/>
+                <a16:creationId xmlns:a16="http://schemas.microsoft.com/office/drawing/2014/main" id="{79666C68-ED3B-4466-AF17-2FD2B9CFE132}"/>
               </a:ext>
             </a:extLst>
           </p:cNvPr>
@@ -1106,7 +1081,7 @@
           <p:cNvPr id="4" name="Accent rule">
             <a:extLst xmlns:a="http://schemas.openxmlformats.org/drawingml/2006/main">
               <a:ext uri="{FF2B5EF4-FFF2-40B4-BE49-F238E27FC236}">
-                <a16:creationId xmlns:a16="http://schemas.microsoft.com/office/drawing/2014/main" id="{14EC8DE0-9C23-48EF-92BF-6F1E31C3C7FA}"/>
+                <a16:creationId xmlns:a16="http://schemas.microsoft.com/office/drawing/2014/main" id="{E7CCC0B2-1D4E-477F-9912-52A8733C783A}"/>
               </a:ext>
             </a:extLst>
           </p:cNvPr>
@@ -1137,7 +1112,7 @@
           <p:cNvPr id="2" name="Title">
             <a:extLst xmlns:a="http://schemas.openxmlformats.org/drawingml/2006/main">
               <a:ext uri="{FF2B5EF4-FFF2-40B4-BE49-F238E27FC236}">
-                <a16:creationId xmlns:a16="http://schemas.microsoft.com/office/drawing/2014/main" id="{A67F76D0-E995-4CC0-9592-04C51E2C704E}"/>
+                <a16:creationId xmlns:a16="http://schemas.microsoft.com/office/drawing/2014/main" id="{F05B6B3C-D7FA-4989-8615-7E32FF9EC29A}"/>
               </a:ext>
             </a:extLst>
           </p:cNvPr>
@@ -1284,7 +1259,7 @@
           <p:cNvPr id="3" name="Body">
             <a:extLst xmlns:a="http://schemas.openxmlformats.org/drawingml/2006/main">
               <a:ext uri="{FF2B5EF4-FFF2-40B4-BE49-F238E27FC236}">
-                <a16:creationId xmlns:a16="http://schemas.microsoft.com/office/drawing/2014/main" id="{3E151503-9884-4567-80D8-B1C20C7192FF}"/>
+                <a16:creationId xmlns:a16="http://schemas.microsoft.com/office/drawing/2014/main" id="{6BE2AF7B-B60D-4885-A0E1-6560BA3F8F87}"/>
               </a:ext>
             </a:extLst>
           </p:cNvPr>
@@ -1448,7 +1423,7 @@
           <p:cNvPr id="5" name="Accent rule">
             <a:extLst xmlns:a="http://schemas.openxmlformats.org/drawingml/2006/main">
               <a:ext uri="{FF2B5EF4-FFF2-40B4-BE49-F238E27FC236}">
-                <a16:creationId xmlns:a16="http://schemas.microsoft.com/office/drawing/2014/main" id="{A9CAD221-D621-4791-81F5-2105B1334DA8}"/>
+                <a16:creationId xmlns:a16="http://schemas.microsoft.com/office/drawing/2014/main" id="{BF4DBB7C-055F-44EF-A9F8-C3B24E66C8DD}"/>
               </a:ext>
             </a:extLst>
           </p:cNvPr>
@@ -1479,7 +1454,7 @@
           <p:cNvPr id="2" name="Title">
             <a:extLst xmlns:a="http://schemas.openxmlformats.org/drawingml/2006/main">
               <a:ext uri="{FF2B5EF4-FFF2-40B4-BE49-F238E27FC236}">
-                <a16:creationId xmlns:a16="http://schemas.microsoft.com/office/drawing/2014/main" id="{18E04185-FF8C-48D7-A147-C8DD7CE3C9CE}"/>
+                <a16:creationId xmlns:a16="http://schemas.microsoft.com/office/drawing/2014/main" id="{6849A163-8AE8-45CC-8466-E990A4563171}"/>
               </a:ext>
             </a:extLst>
           </p:cNvPr>
@@ -1626,7 +1601,7 @@
           <p:cNvPr id="3" name="Left column">
             <a:extLst xmlns:a="http://schemas.openxmlformats.org/drawingml/2006/main">
               <a:ext uri="{FF2B5EF4-FFF2-40B4-BE49-F238E27FC236}">
-                <a16:creationId xmlns:a16="http://schemas.microsoft.com/office/drawing/2014/main" id="{E1A0CD91-49CE-4CE1-8934-B5EA5DE7344D}"/>
+                <a16:creationId xmlns:a16="http://schemas.microsoft.com/office/drawing/2014/main" id="{42296A2C-5539-4657-8069-92C34D7E6D42}"/>
               </a:ext>
             </a:extLst>
           </p:cNvPr>
@@ -1773,7 +1748,7 @@
           <p:cNvPr id="4" name="Right column">
             <a:extLst xmlns:a="http://schemas.openxmlformats.org/drawingml/2006/main">
               <a:ext uri="{FF2B5EF4-FFF2-40B4-BE49-F238E27FC236}">
-                <a16:creationId xmlns:a16="http://schemas.microsoft.com/office/drawing/2014/main" id="{3FDB64A3-F40F-47AD-B095-5324E1262124}"/>
+                <a16:creationId xmlns:a16="http://schemas.microsoft.com/office/drawing/2014/main" id="{2EE56526-D7F6-4E54-B9D0-C92BF0072E16}"/>
               </a:ext>
             </a:extLst>
           </p:cNvPr>
@@ -1937,7 +1912,7 @@
           <p:cNvPr id="4" name="Accent rule">
             <a:extLst xmlns:a="http://schemas.openxmlformats.org/drawingml/2006/main">
               <a:ext uri="{FF2B5EF4-FFF2-40B4-BE49-F238E27FC236}">
-                <a16:creationId xmlns:a16="http://schemas.microsoft.com/office/drawing/2014/main" id="{CFC1A413-F8A7-4378-ADCB-60D5EE8C58BB}"/>
+                <a16:creationId xmlns:a16="http://schemas.microsoft.com/office/drawing/2014/main" id="{3A8292E7-86B3-49A1-B4CE-DFA9DBA6F58A}"/>
               </a:ext>
             </a:extLst>
           </p:cNvPr>
@@ -1968,7 +1943,7 @@
           <p:cNvPr id="2" name="Title">
             <a:extLst xmlns:a="http://schemas.openxmlformats.org/drawingml/2006/main">
               <a:ext uri="{FF2B5EF4-FFF2-40B4-BE49-F238E27FC236}">
-                <a16:creationId xmlns:a16="http://schemas.microsoft.com/office/drawing/2014/main" id="{E78CA519-4B9E-4782-834B-CD1AE207A9B6}"/>
+                <a16:creationId xmlns:a16="http://schemas.microsoft.com/office/drawing/2014/main" id="{1BCA6634-8940-42F3-A5F2-5970F72BEF85}"/>
               </a:ext>
             </a:extLst>
           </p:cNvPr>
@@ -2115,7 +2090,7 @@
           <p:cNvPr id="3" name="Left column">
             <a:extLst xmlns:a="http://schemas.openxmlformats.org/drawingml/2006/main">
               <a:ext uri="{FF2B5EF4-FFF2-40B4-BE49-F238E27FC236}">
-                <a16:creationId xmlns:a16="http://schemas.microsoft.com/office/drawing/2014/main" id="{7F673A30-836D-484F-AF4B-10B0701585FB}"/>
+                <a16:creationId xmlns:a16="http://schemas.microsoft.com/office/drawing/2014/main" id="{981C40E9-FDCB-4159-8EDF-8A0D366AA8FE}"/>
               </a:ext>
             </a:extLst>
           </p:cNvPr>
@@ -2300,12 +2275,12 @@
   </p:cSld>
   <p:clrMap bg1="lt1" tx1="dk1" bg2="lt2" tx2="dk2" accent1="accent1" accent2="accent2" accent3="accent3" accent4="accent4" accent5="accent5" accent6="accent6" hlink="hlink" folHlink="folHlink"/>
   <p:sldLayoutIdLst>
-    <p:sldLayoutId xmlns:r="http://schemas.openxmlformats.org/officeDocument/2006/relationships" id="2147483649" r:id="R5898e573aeb24804"/>
-    <p:sldLayoutId xmlns:r="http://schemas.openxmlformats.org/officeDocument/2006/relationships" id="2147483650" r:id="R772186e124984fb8"/>
-    <p:sldLayoutId xmlns:r="http://schemas.openxmlformats.org/officeDocument/2006/relationships" id="2147483651" r:id="Rf7cbe5c8ae634ff8"/>
-    <p:sldLayoutId xmlns:r="http://schemas.openxmlformats.org/officeDocument/2006/relationships" id="2147483652" r:id="R9bfcf1d67c66457e"/>
-    <p:sldLayoutId xmlns:r="http://schemas.openxmlformats.org/officeDocument/2006/relationships" id="2147483653" r:id="R3d744bda9c7848ae"/>
-    <p:sldLayoutId xmlns:r="http://schemas.openxmlformats.org/officeDocument/2006/relationships" id="2147483654" r:id="Rdc9cca02893a4f16"/>
+    <p:sldLayoutId xmlns:r="http://schemas.openxmlformats.org/officeDocument/2006/relationships" id="2147483649" r:id="R551dc9a10c354b8d"/>
+    <p:sldLayoutId xmlns:r="http://schemas.openxmlformats.org/officeDocument/2006/relationships" id="2147483650" r:id="R752226a4a12f428c"/>
+    <p:sldLayoutId xmlns:r="http://schemas.openxmlformats.org/officeDocument/2006/relationships" id="2147483651" r:id="Rf98b258676654341"/>
+    <p:sldLayoutId xmlns:r="http://schemas.openxmlformats.org/officeDocument/2006/relationships" id="2147483652" r:id="R9b7b24b40a894a05"/>
+    <p:sldLayoutId xmlns:r="http://schemas.openxmlformats.org/officeDocument/2006/relationships" id="2147483653" r:id="Rc3ab22fafb1f4058"/>
+    <p:sldLayoutId xmlns:r="http://schemas.openxmlformats.org/officeDocument/2006/relationships" id="2147483654" r:id="R1781d3a203ce4c15"/>
   </p:sldLayoutIdLst>
   <p:txStyles>
     <p:titleStyle>
@@ -2838,7 +2813,7 @@
     <p:bg>
       <p:bgPr>
         <a:solidFill xmlns:a="http://schemas.openxmlformats.org/drawingml/2006/main">
-          <a:srgbClr val="FFFCF2"/>
+          <a:srgbClr val="FFFDF5"/>
         </a:solidFill>
       </p:bgPr>
     </p:bg>
@@ -2853,10 +2828,10 @@
       </p:grpSpPr>
       <p:sp>
         <p:nvSpPr>
-          <p:cNvPr id="8" name="">
+          <p:cNvPr id="15" name="">
             <a:extLst xmlns:a="http://schemas.openxmlformats.org/drawingml/2006/main">
               <a:ext uri="{FF2B5EF4-FFF2-40B4-BE49-F238E27FC236}">
-                <a16:creationId xmlns:a16="http://schemas.microsoft.com/office/drawing/2014/main" id="{E867B9BA-8AB7-49C9-BD12-91F027F5A293}"/>
+                <a16:creationId xmlns:a16="http://schemas.microsoft.com/office/drawing/2014/main" id="{9C8D69CB-74BA-4066-AFAB-D4668411CEE8}"/>
               </a:ext>
             </a:extLst>
           </p:cNvPr>
@@ -2867,235 +2842,7 @@
         </p:nvSpPr>
         <p:spPr>
           <a:xfrm xmlns:a="http://schemas.openxmlformats.org/drawingml/2006/main">
-            <a:off x="609600" y="333375"/>
-            <a:ext cx="10972800" cy="714375"/>
-          </a:xfrm>
-          <a:prstGeom xmlns:a="http://schemas.openxmlformats.org/drawingml/2006/main" prst="rect">
-            <a:avLst/>
-          </a:prstGeom>
-          <a:noFill xmlns:a="http://schemas.openxmlformats.org/drawingml/2006/main"/>
-          <a:ln xmlns:a="http://schemas.openxmlformats.org/drawingml/2006/main" w="0">
-            <a:noFill/>
-          </a:ln>
-        </p:spPr>
-        <p:txBody>
-          <a:bodyPr xmlns:a="http://schemas.openxmlformats.org/drawingml/2006/main" lIns="0" tIns="0" rIns="0" bIns="0" anchor="t">
-            <a:noAutofit/>
-          </a:bodyPr>
-          <a:lstStyle xmlns:a="http://schemas.openxmlformats.org/drawingml/2006/main"/>
-          <a:p xmlns:a="http://schemas.openxmlformats.org/drawingml/2006/main">
-            <a:pPr>
-              <a:defRPr sz="4050" b="1">
-                <a:solidFill>
-                  <a:srgbClr val="242720"/>
-                </a:solidFill>
-                <a:latin typeface="Arial"/>
-                <a:ea typeface="Arial"/>
-                <a:cs typeface="Arial"/>
-              </a:defRPr>
-            </a:pPr>
-            <a:r>
-              <a:rPr sz="4050" b="1">
-                <a:solidFill>
-                  <a:srgbClr val="242720"/>
-                </a:solidFill>
-                <a:latin typeface="Arial"/>
-                <a:ea typeface="Arial"/>
-                <a:cs typeface="Arial"/>
-              </a:rPr>
-              <a:t>Whiteboard recall</a:t>
-            </a:r>
-          </a:p>
-        </p:txBody>
-      </p:sp>
-      <p:sp>
-        <p:nvSpPr>
-          <p:cNvPr id="2" name="">
-            <a:extLst xmlns:a="http://schemas.openxmlformats.org/drawingml/2006/main">
-              <a:ext uri="{FF2B5EF4-FFF2-40B4-BE49-F238E27FC236}">
-                <a16:creationId xmlns:a16="http://schemas.microsoft.com/office/drawing/2014/main" id="{BFE31B86-A6B5-4FC3-BC86-794E008573A3}"/>
-              </a:ext>
-            </a:extLst>
-          </p:cNvPr>
-          <p:cNvSpPr>
-            <a:spLocks xmlns:a="http://schemas.openxmlformats.org/drawingml/2006/main" noGrp="1"/>
-          </p:cNvSpPr>
-          <p:nvPr/>
-        </p:nvSpPr>
-        <p:spPr>
-          <a:xfrm xmlns:a="http://schemas.openxmlformats.org/drawingml/2006/main">
-            <a:off x="609600" y="1190625"/>
-            <a:ext cx="10972800" cy="476250"/>
-          </a:xfrm>
-          <a:prstGeom xmlns:a="http://schemas.openxmlformats.org/drawingml/2006/main" prst="rect">
-            <a:avLst/>
-          </a:prstGeom>
-          <a:noFill xmlns:a="http://schemas.openxmlformats.org/drawingml/2006/main"/>
-          <a:ln xmlns:a="http://schemas.openxmlformats.org/drawingml/2006/main" w="0">
-            <a:noFill/>
-          </a:ln>
-        </p:spPr>
-        <p:txBody>
-          <a:bodyPr xmlns:a="http://schemas.openxmlformats.org/drawingml/2006/main" lIns="0" tIns="0" rIns="0" bIns="0" anchor="t">
-            <a:noAutofit/>
-          </a:bodyPr>
-          <a:lstStyle xmlns:a="http://schemas.openxmlformats.org/drawingml/2006/main"/>
-          <a:p xmlns:a="http://schemas.openxmlformats.org/drawingml/2006/main">
-            <a:pPr>
-              <a:defRPr sz="2400" b="0">
-                <a:solidFill>
-                  <a:srgbClr val="242720"/>
-                </a:solidFill>
-                <a:latin typeface="Arial"/>
-                <a:ea typeface="Arial"/>
-                <a:cs typeface="Arial"/>
-              </a:defRPr>
-            </a:pPr>
-            <a:r>
-              <a:rPr sz="2400" b="0">
-                <a:solidFill>
-                  <a:srgbClr val="242720"/>
-                </a:solidFill>
-                <a:latin typeface="Arial"/>
-                <a:ea typeface="Arial"/>
-                <a:cs typeface="Arial"/>
-              </a:rPr>
-              <a:t>[Add your topic or retrieval focus]</a:t>
-            </a:r>
-          </a:p>
-        </p:txBody>
-      </p:sp>
-      <p:sp>
-        <p:nvSpPr>
-          <p:cNvPr id="3" name="">
-            <a:extLst xmlns:a="http://schemas.openxmlformats.org/drawingml/2006/main">
-              <a:ext uri="{FF2B5EF4-FFF2-40B4-BE49-F238E27FC236}">
-                <a16:creationId xmlns:a16="http://schemas.microsoft.com/office/drawing/2014/main" id="{8762F4C9-4161-4803-8473-682DFC851FF8}"/>
-              </a:ext>
-            </a:extLst>
-          </p:cNvPr>
-          <p:cNvSpPr>
-            <a:spLocks xmlns:a="http://schemas.openxmlformats.org/drawingml/2006/main" noGrp="1"/>
-          </p:cNvSpPr>
-          <p:nvPr/>
-        </p:nvSpPr>
-        <p:spPr>
-          <a:xfrm xmlns:a="http://schemas.openxmlformats.org/drawingml/2006/main">
-            <a:off x="609600" y="1733550"/>
-            <a:ext cx="10972800" cy="400050"/>
-          </a:xfrm>
-          <a:prstGeom xmlns:a="http://schemas.openxmlformats.org/drawingml/2006/main" prst="rect">
-            <a:avLst/>
-          </a:prstGeom>
-          <a:noFill xmlns:a="http://schemas.openxmlformats.org/drawingml/2006/main"/>
-          <a:ln xmlns:a="http://schemas.openxmlformats.org/drawingml/2006/main" w="0">
-            <a:noFill/>
-          </a:ln>
-        </p:spPr>
-        <p:txBody>
-          <a:bodyPr xmlns:a="http://schemas.openxmlformats.org/drawingml/2006/main" lIns="0" tIns="0" rIns="0" bIns="0" anchor="t">
-            <a:noAutofit/>
-          </a:bodyPr>
-          <a:lstStyle xmlns:a="http://schemas.openxmlformats.org/drawingml/2006/main"/>
-          <a:p xmlns:a="http://schemas.openxmlformats.org/drawingml/2006/main">
-            <a:pPr>
-              <a:defRPr sz="1800" b="0">
-                <a:solidFill>
-                  <a:srgbClr val="28534A"/>
-                </a:solidFill>
-                <a:latin typeface="Arial"/>
-                <a:ea typeface="Arial"/>
-                <a:cs typeface="Arial"/>
-              </a:defRPr>
-            </a:pPr>
-            <a:r>
-              <a:rPr sz="1800" b="0">
-                <a:solidFill>
-                  <a:srgbClr val="28534A"/>
-                </a:solidFill>
-                <a:latin typeface="Arial"/>
-                <a:ea typeface="Arial"/>
-                <a:cs typeface="Arial"/>
-              </a:rPr>
-              <a:t>Recall independently first. Check and improve after feedback.</a:t>
-            </a:r>
-          </a:p>
-        </p:txBody>
-      </p:sp>
-      <p:sp>
-        <p:nvSpPr>
-          <p:cNvPr id="4" name="">
-            <a:extLst xmlns:a="http://schemas.openxmlformats.org/drawingml/2006/main">
-              <a:ext uri="{FF2B5EF4-FFF2-40B4-BE49-F238E27FC236}">
-                <a16:creationId xmlns:a16="http://schemas.microsoft.com/office/drawing/2014/main" id="{84E693F7-98AE-4E87-9332-35904C864CE6}"/>
-              </a:ext>
-            </a:extLst>
-          </p:cNvPr>
-          <p:cNvSpPr>
-            <a:spLocks xmlns:a="http://schemas.openxmlformats.org/drawingml/2006/main" noGrp="1"/>
-          </p:cNvSpPr>
-          <p:nvPr/>
-        </p:nvSpPr>
-        <p:spPr>
-          <a:xfrm xmlns:a="http://schemas.openxmlformats.org/drawingml/2006/main">
-            <a:off x="609600" y="2571750"/>
-            <a:ext cx="10972800" cy="1905000"/>
-          </a:xfrm>
-          <a:prstGeom xmlns:a="http://schemas.openxmlformats.org/drawingml/2006/main" prst="rect">
-            <a:avLst/>
-          </a:prstGeom>
-          <a:noFill xmlns:a="http://schemas.openxmlformats.org/drawingml/2006/main"/>
-          <a:ln xmlns:a="http://schemas.openxmlformats.org/drawingml/2006/main" w="0">
-            <a:noFill/>
-          </a:ln>
-        </p:spPr>
-        <p:txBody>
-          <a:bodyPr xmlns:a="http://schemas.openxmlformats.org/drawingml/2006/main" lIns="0" tIns="0" rIns="0" bIns="0" anchor="t">
-            <a:noAutofit/>
-          </a:bodyPr>
-          <a:lstStyle xmlns:a="http://schemas.openxmlformats.org/drawingml/2006/main"/>
-          <a:p xmlns:a="http://schemas.openxmlformats.org/drawingml/2006/main">
-            <a:pPr>
-              <a:defRPr sz="3150" b="1">
-                <a:solidFill>
-                  <a:srgbClr val="242720"/>
-                </a:solidFill>
-                <a:latin typeface="Arial"/>
-                <a:ea typeface="Arial"/>
-                <a:cs typeface="Arial"/>
-              </a:defRPr>
-            </a:pPr>
-            <a:r>
-              <a:rPr sz="3150" b="1">
-                <a:solidFill>
-                  <a:srgbClr val="242720"/>
-                </a:solidFill>
-                <a:latin typeface="Arial"/>
-                <a:ea typeface="Arial"/>
-                <a:cs typeface="Arial"/>
-              </a:rPr>
-              <a:t>[Add your retrieval prompt]</a:t>
-            </a:r>
-          </a:p>
-        </p:txBody>
-      </p:sp>
-      <p:sp>
-        <p:nvSpPr>
-          <p:cNvPr id="5" name="">
-            <a:extLst xmlns:a="http://schemas.openxmlformats.org/drawingml/2006/main">
-              <a:ext uri="{FF2B5EF4-FFF2-40B4-BE49-F238E27FC236}">
-                <a16:creationId xmlns:a16="http://schemas.microsoft.com/office/drawing/2014/main" id="{55299673-4BC2-4F54-93DF-DA78AD109EAB}"/>
-              </a:ext>
-            </a:extLst>
-          </p:cNvPr>
-          <p:cNvSpPr>
-            <a:spLocks xmlns:a="http://schemas.openxmlformats.org/drawingml/2006/main" noGrp="1"/>
-          </p:cNvSpPr>
-          <p:nvPr/>
-        </p:nvSpPr>
-        <p:spPr>
-          <a:xfrm xmlns:a="http://schemas.openxmlformats.org/drawingml/2006/main">
-            <a:off x="609600" y="4905375"/>
+            <a:off x="609600" y="323850"/>
             <a:ext cx="10972800" cy="666750"/>
           </a:xfrm>
           <a:prstGeom xmlns:a="http://schemas.openxmlformats.org/drawingml/2006/main" prst="rect">
@@ -3113,35 +2860,35 @@
           <a:lstStyle xmlns:a="http://schemas.openxmlformats.org/drawingml/2006/main"/>
           <a:p xmlns:a="http://schemas.openxmlformats.org/drawingml/2006/main">
             <a:pPr>
-              <a:defRPr sz="2100" b="0">
+              <a:defRPr sz="3450" b="1">
                 <a:solidFill>
-                  <a:srgbClr val="242720"/>
+                  <a:srgbClr val="263C3A"/>
                 </a:solidFill>
-                <a:latin typeface="Arial"/>
-                <a:ea typeface="Arial"/>
-                <a:cs typeface="Arial"/>
+                <a:latin typeface="DejaVu Sans"/>
+                <a:ea typeface="DejaVu Sans"/>
+                <a:cs typeface="DejaVu Sans"/>
               </a:defRPr>
             </a:pPr>
             <a:r>
-              <a:rPr sz="2100" b="0">
+              <a:rPr sz="3450" b="1">
                 <a:solidFill>
-                  <a:srgbClr val="242720"/>
+                  <a:srgbClr val="263C3A"/>
                 </a:solidFill>
-                <a:latin typeface="Arial"/>
-                <a:ea typeface="Arial"/>
-                <a:cs typeface="Arial"/>
+                <a:latin typeface="DejaVu Sans"/>
+                <a:ea typeface="DejaVu Sans"/>
+                <a:cs typeface="DejaVu Sans"/>
               </a:rPr>
-              <a:t>Think and write. Keep your board hidden until the signal.</a:t>
+              <a:t>Whiteboard recall</a:t>
             </a:r>
           </a:p>
         </p:txBody>
       </p:sp>
       <p:sp>
         <p:nvSpPr>
-          <p:cNvPr id="6" name="">
+          <p:cNvPr id="2" name="">
             <a:extLst xmlns:a="http://schemas.openxmlformats.org/drawingml/2006/main">
               <a:ext uri="{FF2B5EF4-FFF2-40B4-BE49-F238E27FC236}">
-                <a16:creationId xmlns:a16="http://schemas.microsoft.com/office/drawing/2014/main" id="{28832A3A-44A7-4D63-90E2-FA6D381E7F3A}"/>
+                <a16:creationId xmlns:a16="http://schemas.microsoft.com/office/drawing/2014/main" id="{E58D418B-3BF1-4B3F-BA48-66375606FCC8}"/>
               </a:ext>
             </a:extLst>
           </p:cNvPr>
@@ -3152,8 +2899,8 @@
         </p:nvSpPr>
         <p:spPr>
           <a:xfrm xmlns:a="http://schemas.openxmlformats.org/drawingml/2006/main">
-            <a:off x="609600" y="5953125"/>
-            <a:ext cx="10972800" cy="381000"/>
+            <a:off x="609600" y="1085850"/>
+            <a:ext cx="10972800" cy="409575"/>
           </a:xfrm>
           <a:prstGeom xmlns:a="http://schemas.openxmlformats.org/drawingml/2006/main" prst="rect">
             <a:avLst/>
@@ -3170,35 +2917,35 @@
           <a:lstStyle xmlns:a="http://schemas.openxmlformats.org/drawingml/2006/main"/>
           <a:p xmlns:a="http://schemas.openxmlformats.org/drawingml/2006/main">
             <a:pPr>
-              <a:defRPr sz="1800" b="0">
+              <a:defRPr sz="2175" b="0">
                 <a:solidFill>
-                  <a:srgbClr val="28534A"/>
+                  <a:srgbClr val="687572"/>
                 </a:solidFill>
-                <a:latin typeface="Arial"/>
-                <a:ea typeface="Arial"/>
-                <a:cs typeface="Arial"/>
+                <a:latin typeface="DejaVu Sans"/>
+                <a:ea typeface="DejaVu Sans"/>
+                <a:cs typeface="DejaVu Sans"/>
               </a:defRPr>
             </a:pPr>
             <a:r>
-              <a:rPr sz="1800" b="0">
+              <a:rPr sz="2175" b="0">
                 <a:solidFill>
-                  <a:srgbClr val="28534A"/>
+                  <a:srgbClr val="687572"/>
                 </a:solidFill>
-                <a:latin typeface="Arial"/>
-                <a:ea typeface="Arial"/>
-                <a:cs typeface="Arial"/>
+                <a:latin typeface="DejaVu Sans"/>
+                <a:ea typeface="DejaVu Sans"/>
+                <a:cs typeface="DejaVu Sans"/>
               </a:rPr>
-              <a:t>Time: [Add minutes]     Check: [Add your feedback routine]</a:t>
+              <a:t>[Your topic or retrieval focus]</a:t>
             </a:r>
           </a:p>
         </p:txBody>
       </p:sp>
       <p:sp>
         <p:nvSpPr>
-          <p:cNvPr id="7" name="">
+          <p:cNvPr id="3" name="">
             <a:extLst xmlns:a="http://schemas.openxmlformats.org/drawingml/2006/main">
               <a:ext uri="{FF2B5EF4-FFF2-40B4-BE49-F238E27FC236}">
-                <a16:creationId xmlns:a16="http://schemas.microsoft.com/office/drawing/2014/main" id="{4BDA2B97-F4E4-4650-A55A-F42C44FCDE62}"/>
+                <a16:creationId xmlns:a16="http://schemas.microsoft.com/office/drawing/2014/main" id="{BA119577-EB20-420E-86DE-CB62BBD11393}"/>
               </a:ext>
             </a:extLst>
           </p:cNvPr>
@@ -3209,8 +2956,38 @@
         </p:nvSpPr>
         <p:spPr>
           <a:xfrm xmlns:a="http://schemas.openxmlformats.org/drawingml/2006/main">
-            <a:off x="609600" y="6534150"/>
-            <a:ext cx="10972800" cy="209550"/>
+            <a:off x="609600" y="1676400"/>
+            <a:ext cx="10972800" cy="19050"/>
+          </a:xfrm>
+          <a:prstGeom xmlns:a="http://schemas.openxmlformats.org/drawingml/2006/main" prst="rect">
+            <a:avLst/>
+          </a:prstGeom>
+          <a:solidFill xmlns:a="http://schemas.openxmlformats.org/drawingml/2006/main">
+            <a:srgbClr val="A9BDB7"/>
+          </a:solidFill>
+          <a:ln xmlns:a="http://schemas.openxmlformats.org/drawingml/2006/main" w="0">
+            <a:noFill/>
+          </a:ln>
+        </p:spPr>
+      </p:sp>
+      <p:sp>
+        <p:nvSpPr>
+          <p:cNvPr id="4" name="">
+            <a:extLst xmlns:a="http://schemas.openxmlformats.org/drawingml/2006/main">
+              <a:ext uri="{FF2B5EF4-FFF2-40B4-BE49-F238E27FC236}">
+                <a16:creationId xmlns:a16="http://schemas.microsoft.com/office/drawing/2014/main" id="{85E9B70D-2E73-4AFF-9702-62B3CAA4C870}"/>
+              </a:ext>
+            </a:extLst>
+          </p:cNvPr>
+          <p:cNvSpPr>
+            <a:spLocks xmlns:a="http://schemas.openxmlformats.org/drawingml/2006/main" noGrp="1"/>
+          </p:cNvSpPr>
+          <p:nvPr/>
+        </p:nvSpPr>
+        <p:spPr>
+          <a:xfrm xmlns:a="http://schemas.openxmlformats.org/drawingml/2006/main">
+            <a:off x="609600" y="1828800"/>
+            <a:ext cx="4476750" cy="304800"/>
           </a:xfrm>
           <a:prstGeom xmlns:a="http://schemas.openxmlformats.org/drawingml/2006/main" prst="rect">
             <a:avLst/>
@@ -3227,25 +3004,516 @@
           <a:lstStyle xmlns:a="http://schemas.openxmlformats.org/drawingml/2006/main"/>
           <a:p xmlns:a="http://schemas.openxmlformats.org/drawingml/2006/main">
             <a:pPr>
-              <a:defRPr sz="1050" b="0">
+              <a:defRPr sz="1575" b="1">
                 <a:solidFill>
-                  <a:srgbClr val="62675C"/>
+                  <a:srgbClr val="263C3A"/>
                 </a:solidFill>
-                <a:latin typeface="Arial"/>
-                <a:ea typeface="Arial"/>
-                <a:cs typeface="Arial"/>
+                <a:latin typeface="DejaVu Sans"/>
+                <a:ea typeface="DejaVu Sans"/>
+                <a:cs typeface="DejaVu Sans"/>
               </a:defRPr>
             </a:pPr>
             <a:r>
-              <a:rPr sz="1050" b="0">
+              <a:rPr sz="1575" b="1">
                 <a:solidFill>
-                  <a:srgbClr val="62675C"/>
+                  <a:srgbClr val="263C3A"/>
                 </a:solidFill>
-                <a:latin typeface="Arial"/>
-                <a:ea typeface="Arial"/>
-                <a:cs typeface="Arial"/>
+                <a:latin typeface="DejaVu Sans"/>
+                <a:ea typeface="DejaVu Sans"/>
+                <a:cs typeface="DejaVu Sans"/>
               </a:rPr>
-              <a:t>TNT Teaching Tools   Editable classroom template   Source and teacher guidance in speaker notes</a:t>
+              <a:t>01  Recall from memory</a:t>
+            </a:r>
+          </a:p>
+        </p:txBody>
+      </p:sp>
+      <p:sp>
+        <p:nvSpPr>
+          <p:cNvPr id="5" name="">
+            <a:extLst xmlns:a="http://schemas.openxmlformats.org/drawingml/2006/main">
+              <a:ext uri="{FF2B5EF4-FFF2-40B4-BE49-F238E27FC236}">
+                <a16:creationId xmlns:a16="http://schemas.microsoft.com/office/drawing/2014/main" id="{6F52BD76-7ED1-49A0-BD80-710CB797D534}"/>
+              </a:ext>
+            </a:extLst>
+          </p:cNvPr>
+          <p:cNvSpPr>
+            <a:spLocks xmlns:a="http://schemas.openxmlformats.org/drawingml/2006/main" noGrp="1"/>
+          </p:cNvSpPr>
+          <p:nvPr/>
+        </p:nvSpPr>
+        <p:spPr>
+          <a:xfrm xmlns:a="http://schemas.openxmlformats.org/drawingml/2006/main">
+            <a:off x="6286500" y="1828800"/>
+            <a:ext cx="5048250" cy="304800"/>
+          </a:xfrm>
+          <a:prstGeom xmlns:a="http://schemas.openxmlformats.org/drawingml/2006/main" prst="rect">
+            <a:avLst/>
+          </a:prstGeom>
+          <a:noFill xmlns:a="http://schemas.openxmlformats.org/drawingml/2006/main"/>
+          <a:ln xmlns:a="http://schemas.openxmlformats.org/drawingml/2006/main" w="0">
+            <a:noFill/>
+          </a:ln>
+        </p:spPr>
+        <p:txBody>
+          <a:bodyPr xmlns:a="http://schemas.openxmlformats.org/drawingml/2006/main" lIns="0" tIns="0" rIns="0" bIns="0" anchor="t">
+            <a:noAutofit/>
+          </a:bodyPr>
+          <a:lstStyle xmlns:a="http://schemas.openxmlformats.org/drawingml/2006/main"/>
+          <a:p xmlns:a="http://schemas.openxmlformats.org/drawingml/2006/main">
+            <a:pPr>
+              <a:defRPr sz="1575" b="1">
+                <a:solidFill>
+                  <a:srgbClr val="263C3A"/>
+                </a:solidFill>
+                <a:latin typeface="DejaVu Sans"/>
+                <a:ea typeface="DejaVu Sans"/>
+                <a:cs typeface="DejaVu Sans"/>
+              </a:defRPr>
+            </a:pPr>
+            <a:r>
+              <a:rPr sz="1575" b="1">
+                <a:solidFill>
+                  <a:srgbClr val="263C3A"/>
+                </a:solidFill>
+                <a:latin typeface="DejaVu Sans"/>
+                <a:ea typeface="DejaVu Sans"/>
+                <a:cs typeface="DejaVu Sans"/>
+              </a:rPr>
+              <a:t>02  Check and improve</a:t>
+            </a:r>
+          </a:p>
+        </p:txBody>
+      </p:sp>
+      <p:sp>
+        <p:nvSpPr>
+          <p:cNvPr id="6" name="">
+            <a:extLst xmlns:a="http://schemas.openxmlformats.org/drawingml/2006/main">
+              <a:ext uri="{FF2B5EF4-FFF2-40B4-BE49-F238E27FC236}">
+                <a16:creationId xmlns:a16="http://schemas.microsoft.com/office/drawing/2014/main" id="{15CC13EB-55CD-48BE-B967-D4F8733AE708}"/>
+              </a:ext>
+            </a:extLst>
+          </p:cNvPr>
+          <p:cNvSpPr>
+            <a:spLocks xmlns:a="http://schemas.openxmlformats.org/drawingml/2006/main" noGrp="1"/>
+          </p:cNvSpPr>
+          <p:nvPr/>
+        </p:nvSpPr>
+        <p:spPr>
+          <a:xfrm xmlns:a="http://schemas.openxmlformats.org/drawingml/2006/main">
+            <a:off x="609600" y="2247900"/>
+            <a:ext cx="10972800" cy="2762250"/>
+          </a:xfrm>
+          <a:prstGeom xmlns:a="http://schemas.openxmlformats.org/drawingml/2006/main" prst="rect">
+            <a:avLst/>
+          </a:prstGeom>
+          <a:solidFill xmlns:a="http://schemas.openxmlformats.org/drawingml/2006/main">
+            <a:srgbClr val="EDF2F5"/>
+          </a:solidFill>
+          <a:ln xmlns:a="http://schemas.openxmlformats.org/drawingml/2006/main" w="9525">
+            <a:solidFill>
+              <a:srgbClr val="D4DFDB"/>
+            </a:solidFill>
+          </a:ln>
+        </p:spPr>
+      </p:sp>
+      <p:sp>
+        <p:nvSpPr>
+          <p:cNvPr id="7" name="">
+            <a:extLst xmlns:a="http://schemas.openxmlformats.org/drawingml/2006/main">
+              <a:ext uri="{FF2B5EF4-FFF2-40B4-BE49-F238E27FC236}">
+                <a16:creationId xmlns:a16="http://schemas.microsoft.com/office/drawing/2014/main" id="{CFD4418A-C5E9-4150-889B-ECC51DD898C2}"/>
+              </a:ext>
+            </a:extLst>
+          </p:cNvPr>
+          <p:cNvSpPr>
+            <a:spLocks xmlns:a="http://schemas.openxmlformats.org/drawingml/2006/main" noGrp="1"/>
+          </p:cNvSpPr>
+          <p:nvPr/>
+        </p:nvSpPr>
+        <p:spPr>
+          <a:xfrm xmlns:a="http://schemas.openxmlformats.org/drawingml/2006/main">
+            <a:off x="800100" y="2419350"/>
+            <a:ext cx="381000" cy="381000"/>
+          </a:xfrm>
+          <a:prstGeom xmlns:a="http://schemas.openxmlformats.org/drawingml/2006/main" prst="ellipse">
+            <a:avLst/>
+          </a:prstGeom>
+          <a:solidFill xmlns:a="http://schemas.openxmlformats.org/drawingml/2006/main">
+            <a:srgbClr val="FFFFFF"/>
+          </a:solidFill>
+          <a:ln xmlns:a="http://schemas.openxmlformats.org/drawingml/2006/main" w="0">
+            <a:noFill/>
+          </a:ln>
+        </p:spPr>
+      </p:sp>
+      <p:sp>
+        <p:nvSpPr>
+          <p:cNvPr id="8" name="">
+            <a:extLst xmlns:a="http://schemas.openxmlformats.org/drawingml/2006/main">
+              <a:ext uri="{FF2B5EF4-FFF2-40B4-BE49-F238E27FC236}">
+                <a16:creationId xmlns:a16="http://schemas.microsoft.com/office/drawing/2014/main" id="{B07DF9C8-B205-4DFE-8A44-44FE64FE8C98}"/>
+              </a:ext>
+            </a:extLst>
+          </p:cNvPr>
+          <p:cNvSpPr>
+            <a:spLocks xmlns:a="http://schemas.openxmlformats.org/drawingml/2006/main" noGrp="1"/>
+          </p:cNvSpPr>
+          <p:nvPr/>
+        </p:nvSpPr>
+        <p:spPr>
+          <a:xfrm xmlns:a="http://schemas.openxmlformats.org/drawingml/2006/main">
+            <a:off x="857250" y="2486025"/>
+            <a:ext cx="342900" cy="285750"/>
+          </a:xfrm>
+          <a:prstGeom xmlns:a="http://schemas.openxmlformats.org/drawingml/2006/main" prst="rect">
+            <a:avLst/>
+          </a:prstGeom>
+          <a:noFill xmlns:a="http://schemas.openxmlformats.org/drawingml/2006/main"/>
+          <a:ln xmlns:a="http://schemas.openxmlformats.org/drawingml/2006/main" w="0">
+            <a:noFill/>
+          </a:ln>
+        </p:spPr>
+        <p:txBody>
+          <a:bodyPr xmlns:a="http://schemas.openxmlformats.org/drawingml/2006/main" lIns="0" tIns="0" rIns="0" bIns="0" anchor="t">
+            <a:noAutofit/>
+          </a:bodyPr>
+          <a:lstStyle xmlns:a="http://schemas.openxmlformats.org/drawingml/2006/main"/>
+          <a:p xmlns:a="http://schemas.openxmlformats.org/drawingml/2006/main">
+            <a:pPr>
+              <a:defRPr sz="1350" b="1">
+                <a:solidFill>
+                  <a:srgbClr val="263C3A"/>
+                </a:solidFill>
+                <a:latin typeface="DejaVu Sans"/>
+                <a:ea typeface="DejaVu Sans"/>
+                <a:cs typeface="DejaVu Sans"/>
+              </a:defRPr>
+            </a:pPr>
+            <a:r>
+              <a:rPr sz="1350" b="1">
+                <a:solidFill>
+                  <a:srgbClr val="263C3A"/>
+                </a:solidFill>
+                <a:latin typeface="DejaVu Sans"/>
+                <a:ea typeface="DejaVu Sans"/>
+                <a:cs typeface="DejaVu Sans"/>
+              </a:rPr>
+              <a:t>01</a:t>
+            </a:r>
+          </a:p>
+        </p:txBody>
+      </p:sp>
+      <p:sp>
+        <p:nvSpPr>
+          <p:cNvPr id="9" name="">
+            <a:extLst xmlns:a="http://schemas.openxmlformats.org/drawingml/2006/main">
+              <a:ext uri="{FF2B5EF4-FFF2-40B4-BE49-F238E27FC236}">
+                <a16:creationId xmlns:a16="http://schemas.microsoft.com/office/drawing/2014/main" id="{073DF597-FE26-4D7F-A6BA-D94D55E22B33}"/>
+              </a:ext>
+            </a:extLst>
+          </p:cNvPr>
+          <p:cNvSpPr>
+            <a:spLocks xmlns:a="http://schemas.openxmlformats.org/drawingml/2006/main" noGrp="1"/>
+          </p:cNvSpPr>
+          <p:nvPr/>
+        </p:nvSpPr>
+        <p:spPr>
+          <a:xfrm xmlns:a="http://schemas.openxmlformats.org/drawingml/2006/main">
+            <a:off x="1352550" y="2466975"/>
+            <a:ext cx="10039350" cy="428625"/>
+          </a:xfrm>
+          <a:prstGeom xmlns:a="http://schemas.openxmlformats.org/drawingml/2006/main" prst="rect">
+            <a:avLst/>
+          </a:prstGeom>
+          <a:noFill xmlns:a="http://schemas.openxmlformats.org/drawingml/2006/main"/>
+          <a:ln xmlns:a="http://schemas.openxmlformats.org/drawingml/2006/main" w="0">
+            <a:noFill/>
+          </a:ln>
+        </p:spPr>
+        <p:txBody>
+          <a:bodyPr xmlns:a="http://schemas.openxmlformats.org/drawingml/2006/main" lIns="0" tIns="0" rIns="0" bIns="0" anchor="t">
+            <a:noAutofit/>
+          </a:bodyPr>
+          <a:lstStyle xmlns:a="http://schemas.openxmlformats.org/drawingml/2006/main"/>
+          <a:p xmlns:a="http://schemas.openxmlformats.org/drawingml/2006/main">
+            <a:pPr>
+              <a:defRPr sz="1725" b="1">
+                <a:solidFill>
+                  <a:srgbClr val="263C3A"/>
+                </a:solidFill>
+                <a:latin typeface="DejaVu Sans"/>
+                <a:ea typeface="DejaVu Sans"/>
+                <a:cs typeface="DejaVu Sans"/>
+              </a:defRPr>
+            </a:pPr>
+            <a:r>
+              <a:rPr sz="1725" b="1">
+                <a:solidFill>
+                  <a:srgbClr val="263C3A"/>
+                </a:solidFill>
+                <a:latin typeface="DejaVu Sans"/>
+                <a:ea typeface="DejaVu Sans"/>
+                <a:cs typeface="DejaVu Sans"/>
+              </a:rPr>
+              <a:t>Think first</a:t>
+            </a:r>
+          </a:p>
+        </p:txBody>
+      </p:sp>
+      <p:sp>
+        <p:nvSpPr>
+          <p:cNvPr id="10" name="">
+            <a:extLst xmlns:a="http://schemas.openxmlformats.org/drawingml/2006/main">
+              <a:ext uri="{FF2B5EF4-FFF2-40B4-BE49-F238E27FC236}">
+                <a16:creationId xmlns:a16="http://schemas.microsoft.com/office/drawing/2014/main" id="{D3C96307-C79E-48AA-8FAE-65A0D5F73C2D}"/>
+              </a:ext>
+            </a:extLst>
+          </p:cNvPr>
+          <p:cNvSpPr>
+            <a:spLocks xmlns:a="http://schemas.openxmlformats.org/drawingml/2006/main" noGrp="1"/>
+          </p:cNvSpPr>
+          <p:nvPr/>
+        </p:nvSpPr>
+        <p:spPr>
+          <a:xfrm xmlns:a="http://schemas.openxmlformats.org/drawingml/2006/main">
+            <a:off x="819150" y="2990850"/>
+            <a:ext cx="10553700" cy="1857375"/>
+          </a:xfrm>
+          <a:prstGeom xmlns:a="http://schemas.openxmlformats.org/drawingml/2006/main" prst="rect">
+            <a:avLst/>
+          </a:prstGeom>
+          <a:noFill xmlns:a="http://schemas.openxmlformats.org/drawingml/2006/main"/>
+          <a:ln xmlns:a="http://schemas.openxmlformats.org/drawingml/2006/main" w="0">
+            <a:noFill/>
+          </a:ln>
+        </p:spPr>
+        <p:txBody>
+          <a:bodyPr xmlns:a="http://schemas.openxmlformats.org/drawingml/2006/main" lIns="0" tIns="0" rIns="0" bIns="0" anchor="t">
+            <a:noAutofit/>
+          </a:bodyPr>
+          <a:lstStyle xmlns:a="http://schemas.openxmlformats.org/drawingml/2006/main"/>
+          <a:p xmlns:a="http://schemas.openxmlformats.org/drawingml/2006/main">
+            <a:pPr>
+              <a:defRPr sz="1950" b="0">
+                <a:solidFill>
+                  <a:srgbClr val="687572"/>
+                </a:solidFill>
+                <a:latin typeface="DejaVu Sans"/>
+                <a:ea typeface="DejaVu Sans"/>
+                <a:cs typeface="DejaVu Sans"/>
+              </a:defRPr>
+            </a:pPr>
+            <a:r>
+              <a:rPr sz="1950" b="0">
+                <a:solidFill>
+                  <a:srgbClr val="687572"/>
+                </a:solidFill>
+                <a:latin typeface="DejaVu Sans"/>
+                <a:ea typeface="DejaVu Sans"/>
+                <a:cs typeface="DejaVu Sans"/>
+              </a:rPr>
+              <a:t>[Your retrieval prompt]</a:t>
+            </a:r>
+          </a:p>
+        </p:txBody>
+      </p:sp>
+      <p:sp>
+        <p:nvSpPr>
+          <p:cNvPr id="11" name="">
+            <a:extLst xmlns:a="http://schemas.openxmlformats.org/drawingml/2006/main">
+              <a:ext uri="{FF2B5EF4-FFF2-40B4-BE49-F238E27FC236}">
+                <a16:creationId xmlns:a16="http://schemas.microsoft.com/office/drawing/2014/main" id="{2D90BB5B-3118-4F8F-A02B-846A5B30C6A7}"/>
+              </a:ext>
+            </a:extLst>
+          </p:cNvPr>
+          <p:cNvSpPr>
+            <a:spLocks xmlns:a="http://schemas.openxmlformats.org/drawingml/2006/main" noGrp="1"/>
+          </p:cNvSpPr>
+          <p:nvPr/>
+        </p:nvSpPr>
+        <p:spPr>
+          <a:xfrm xmlns:a="http://schemas.openxmlformats.org/drawingml/2006/main">
+            <a:off x="609600" y="5267325"/>
+            <a:ext cx="10972800" cy="438150"/>
+          </a:xfrm>
+          <a:prstGeom xmlns:a="http://schemas.openxmlformats.org/drawingml/2006/main" prst="rect">
+            <a:avLst/>
+          </a:prstGeom>
+          <a:noFill xmlns:a="http://schemas.openxmlformats.org/drawingml/2006/main"/>
+          <a:ln xmlns:a="http://schemas.openxmlformats.org/drawingml/2006/main" w="0">
+            <a:noFill/>
+          </a:ln>
+        </p:spPr>
+        <p:txBody>
+          <a:bodyPr xmlns:a="http://schemas.openxmlformats.org/drawingml/2006/main" lIns="0" tIns="0" rIns="0" bIns="0" anchor="t">
+            <a:noAutofit/>
+          </a:bodyPr>
+          <a:lstStyle xmlns:a="http://schemas.openxmlformats.org/drawingml/2006/main"/>
+          <a:p xmlns:a="http://schemas.openxmlformats.org/drawingml/2006/main">
+            <a:pPr>
+              <a:defRPr sz="1950" b="0">
+                <a:solidFill>
+                  <a:srgbClr val="263C3A"/>
+                </a:solidFill>
+                <a:latin typeface="DejaVu Sans"/>
+                <a:ea typeface="DejaVu Sans"/>
+                <a:cs typeface="DejaVu Sans"/>
+              </a:defRPr>
+            </a:pPr>
+            <a:r>
+              <a:rPr sz="1950" b="0">
+                <a:solidFill>
+                  <a:srgbClr val="263C3A"/>
+                </a:solidFill>
+                <a:latin typeface="DejaVu Sans"/>
+                <a:ea typeface="DejaVu Sans"/>
+                <a:cs typeface="DejaVu Sans"/>
+              </a:rPr>
+              <a:t>Write. Cover your board. Reveal together on the signal.</a:t>
+            </a:r>
+          </a:p>
+        </p:txBody>
+      </p:sp>
+      <p:sp>
+        <p:nvSpPr>
+          <p:cNvPr id="12" name="">
+            <a:extLst xmlns:a="http://schemas.openxmlformats.org/drawingml/2006/main">
+              <a:ext uri="{FF2B5EF4-FFF2-40B4-BE49-F238E27FC236}">
+                <a16:creationId xmlns:a16="http://schemas.microsoft.com/office/drawing/2014/main" id="{7A82C7AA-3E95-44E1-9163-B795AED0744E}"/>
+              </a:ext>
+            </a:extLst>
+          </p:cNvPr>
+          <p:cNvSpPr>
+            <a:spLocks xmlns:a="http://schemas.openxmlformats.org/drawingml/2006/main" noGrp="1"/>
+          </p:cNvSpPr>
+          <p:nvPr/>
+        </p:nvSpPr>
+        <p:spPr>
+          <a:xfrm xmlns:a="http://schemas.openxmlformats.org/drawingml/2006/main">
+            <a:off x="609600" y="5953125"/>
+            <a:ext cx="10972800" cy="9525"/>
+          </a:xfrm>
+          <a:prstGeom xmlns:a="http://schemas.openxmlformats.org/drawingml/2006/main" prst="rect">
+            <a:avLst/>
+          </a:prstGeom>
+          <a:solidFill xmlns:a="http://schemas.openxmlformats.org/drawingml/2006/main">
+            <a:srgbClr val="A9BDB7"/>
+          </a:solidFill>
+          <a:ln xmlns:a="http://schemas.openxmlformats.org/drawingml/2006/main" w="0">
+            <a:noFill/>
+          </a:ln>
+        </p:spPr>
+      </p:sp>
+      <p:sp>
+        <p:nvSpPr>
+          <p:cNvPr id="13" name="">
+            <a:extLst xmlns:a="http://schemas.openxmlformats.org/drawingml/2006/main">
+              <a:ext uri="{FF2B5EF4-FFF2-40B4-BE49-F238E27FC236}">
+                <a16:creationId xmlns:a16="http://schemas.microsoft.com/office/drawing/2014/main" id="{E16FFADB-5C6F-4351-BC73-86664498330F}"/>
+              </a:ext>
+            </a:extLst>
+          </p:cNvPr>
+          <p:cNvSpPr>
+            <a:spLocks xmlns:a="http://schemas.openxmlformats.org/drawingml/2006/main" noGrp="1"/>
+          </p:cNvSpPr>
+          <p:nvPr/>
+        </p:nvSpPr>
+        <p:spPr>
+          <a:xfrm xmlns:a="http://schemas.openxmlformats.org/drawingml/2006/main">
+            <a:off x="609600" y="6191250"/>
+            <a:ext cx="3238500" cy="361950"/>
+          </a:xfrm>
+          <a:prstGeom xmlns:a="http://schemas.openxmlformats.org/drawingml/2006/main" prst="rect">
+            <a:avLst/>
+          </a:prstGeom>
+          <a:noFill xmlns:a="http://schemas.openxmlformats.org/drawingml/2006/main"/>
+          <a:ln xmlns:a="http://schemas.openxmlformats.org/drawingml/2006/main" w="0">
+            <a:noFill/>
+          </a:ln>
+        </p:spPr>
+        <p:txBody>
+          <a:bodyPr xmlns:a="http://schemas.openxmlformats.org/drawingml/2006/main" lIns="0" tIns="0" rIns="0" bIns="0" anchor="t">
+            <a:noAutofit/>
+          </a:bodyPr>
+          <a:lstStyle xmlns:a="http://schemas.openxmlformats.org/drawingml/2006/main"/>
+          <a:p xmlns:a="http://schemas.openxmlformats.org/drawingml/2006/main">
+            <a:pPr>
+              <a:defRPr sz="1650" b="0">
+                <a:solidFill>
+                  <a:srgbClr val="687572"/>
+                </a:solidFill>
+                <a:latin typeface="DejaVu Sans"/>
+                <a:ea typeface="DejaVu Sans"/>
+                <a:cs typeface="DejaVu Sans"/>
+              </a:defRPr>
+            </a:pPr>
+            <a:r>
+              <a:rPr sz="1650" b="0">
+                <a:solidFill>
+                  <a:srgbClr val="687572"/>
+                </a:solidFill>
+                <a:latin typeface="DejaVu Sans"/>
+                <a:ea typeface="DejaVu Sans"/>
+                <a:cs typeface="DejaVu Sans"/>
+              </a:rPr>
+              <a:t>Time: [Minutes]</a:t>
+            </a:r>
+          </a:p>
+        </p:txBody>
+      </p:sp>
+      <p:sp>
+        <p:nvSpPr>
+          <p:cNvPr id="14" name="">
+            <a:extLst xmlns:a="http://schemas.openxmlformats.org/drawingml/2006/main">
+              <a:ext uri="{FF2B5EF4-FFF2-40B4-BE49-F238E27FC236}">
+                <a16:creationId xmlns:a16="http://schemas.microsoft.com/office/drawing/2014/main" id="{C85C5411-7E66-4CCD-9726-9EE50F6EFFB0}"/>
+              </a:ext>
+            </a:extLst>
+          </p:cNvPr>
+          <p:cNvSpPr>
+            <a:spLocks xmlns:a="http://schemas.openxmlformats.org/drawingml/2006/main" noGrp="1"/>
+          </p:cNvSpPr>
+          <p:nvPr/>
+        </p:nvSpPr>
+        <p:spPr>
+          <a:xfrm xmlns:a="http://schemas.openxmlformats.org/drawingml/2006/main">
+            <a:off x="4286250" y="6191250"/>
+            <a:ext cx="7296150" cy="361950"/>
+          </a:xfrm>
+          <a:prstGeom xmlns:a="http://schemas.openxmlformats.org/drawingml/2006/main" prst="rect">
+            <a:avLst/>
+          </a:prstGeom>
+          <a:noFill xmlns:a="http://schemas.openxmlformats.org/drawingml/2006/main"/>
+          <a:ln xmlns:a="http://schemas.openxmlformats.org/drawingml/2006/main" w="0">
+            <a:noFill/>
+          </a:ln>
+        </p:spPr>
+        <p:txBody>
+          <a:bodyPr xmlns:a="http://schemas.openxmlformats.org/drawingml/2006/main" lIns="0" tIns="0" rIns="0" bIns="0" anchor="t">
+            <a:noAutofit/>
+          </a:bodyPr>
+          <a:lstStyle xmlns:a="http://schemas.openxmlformats.org/drawingml/2006/main"/>
+          <a:p xmlns:a="http://schemas.openxmlformats.org/drawingml/2006/main">
+            <a:pPr>
+              <a:defRPr sz="1650" b="0">
+                <a:solidFill>
+                  <a:srgbClr val="687572"/>
+                </a:solidFill>
+                <a:latin typeface="DejaVu Sans"/>
+                <a:ea typeface="DejaVu Sans"/>
+                <a:cs typeface="DejaVu Sans"/>
+              </a:defRPr>
+            </a:pPr>
+            <a:r>
+              <a:rPr sz="1650" b="0">
+                <a:solidFill>
+                  <a:srgbClr val="687572"/>
+                </a:solidFill>
+                <a:latin typeface="DejaVu Sans"/>
+                <a:ea typeface="DejaVu Sans"/>
+                <a:cs typeface="DejaVu Sans"/>
+              </a:rPr>
+              <a:t>Feedback: [Your checking routine]</a:t>
             </a:r>
           </a:p>
         </p:txBody>
@@ -3253,7 +3521,7 @@
     </p:spTree>
     <p:extLst>
       <p:ext uri="{BB962C8B-B14F-4D97-AF65-F5344CB8AC3E}">
-        <p14:creationId xmlns:p14="http://schemas.microsoft.com/office/powerpoint/2010/main" val="1062731994"/>
+        <p14:creationId xmlns:p14="http://schemas.microsoft.com/office/powerpoint/2010/main" val="2021289171"/>
       </p:ext>
     </p:extLst>
   </p:cSld>
